--- a/AgenticAI/1-Intro-To-AgenticAI/2_Agent_vs_Chatbot_Finance.pptx
+++ b/AgenticAI/1-Intro-To-AgenticAI/2_Agent_vs_Chatbot_Finance.pptx
@@ -221,7 +221,7 @@
           <a:p>
             <a:fld id="{7BAEECA8-D063-486F-AE31-5020270C1449}" type="datetimeFigureOut">
               <a:rPr lang="en-US" smtClean="0"/>
-              <a:t>5/22/2026</a:t>
+              <a:t>6/5/2026</a:t>
             </a:fld>
             <a:endParaRPr lang="en-US"/>
           </a:p>
@@ -398,7 +398,7 @@
           <a:p>
             <a:fld id="{CB233BD1-3BA8-448D-9D08-7846095EA517}" type="datetimeFigureOut">
               <a:rPr lang="en-US" smtClean="0"/>
-              <a:t>5/22/2026</a:t>
+              <a:t>6/5/2026</a:t>
             </a:fld>
             <a:endParaRPr lang="en-US"/>
           </a:p>
@@ -812,7 +812,7 @@
           <a:p>
             <a:fld id="{6383FAE1-13DE-4511-8C1B-C8AFB720664C}" type="datetimeFigureOut">
               <a:rPr lang="en-US" smtClean="0"/>
-              <a:t>5/22/2026</a:t>
+              <a:t>6/5/2026</a:t>
             </a:fld>
             <a:endParaRPr lang="en-US"/>
           </a:p>
@@ -1010,7 +1010,7 @@
           <a:p>
             <a:fld id="{6383FAE1-13DE-4511-8C1B-C8AFB720664C}" type="datetimeFigureOut">
               <a:rPr lang="en-US" smtClean="0"/>
-              <a:t>5/22/2026</a:t>
+              <a:t>6/5/2026</a:t>
             </a:fld>
             <a:endParaRPr lang="en-US"/>
           </a:p>
@@ -1218,7 +1218,7 @@
           <a:p>
             <a:fld id="{6383FAE1-13DE-4511-8C1B-C8AFB720664C}" type="datetimeFigureOut">
               <a:rPr lang="en-US" smtClean="0"/>
-              <a:t>5/22/2026</a:t>
+              <a:t>6/5/2026</a:t>
             </a:fld>
             <a:endParaRPr lang="en-US"/>
           </a:p>
@@ -1416,7 +1416,7 @@
           <a:p>
             <a:fld id="{6383FAE1-13DE-4511-8C1B-C8AFB720664C}" type="datetimeFigureOut">
               <a:rPr lang="en-US" smtClean="0"/>
-              <a:t>5/22/2026</a:t>
+              <a:t>6/5/2026</a:t>
             </a:fld>
             <a:endParaRPr lang="en-US"/>
           </a:p>
@@ -1691,7 +1691,7 @@
           <a:p>
             <a:fld id="{6383FAE1-13DE-4511-8C1B-C8AFB720664C}" type="datetimeFigureOut">
               <a:rPr lang="en-US" smtClean="0"/>
-              <a:t>5/22/2026</a:t>
+              <a:t>6/5/2026</a:t>
             </a:fld>
             <a:endParaRPr lang="en-US"/>
           </a:p>
@@ -1956,7 +1956,7 @@
           <a:p>
             <a:fld id="{6383FAE1-13DE-4511-8C1B-C8AFB720664C}" type="datetimeFigureOut">
               <a:rPr lang="en-US" smtClean="0"/>
-              <a:t>5/22/2026</a:t>
+              <a:t>6/5/2026</a:t>
             </a:fld>
             <a:endParaRPr lang="en-US"/>
           </a:p>
@@ -2368,7 +2368,7 @@
           <a:p>
             <a:fld id="{6383FAE1-13DE-4511-8C1B-C8AFB720664C}" type="datetimeFigureOut">
               <a:rPr lang="en-US" smtClean="0"/>
-              <a:t>5/22/2026</a:t>
+              <a:t>6/5/2026</a:t>
             </a:fld>
             <a:endParaRPr lang="en-US"/>
           </a:p>
@@ -2509,7 +2509,7 @@
           <a:p>
             <a:fld id="{6383FAE1-13DE-4511-8C1B-C8AFB720664C}" type="datetimeFigureOut">
               <a:rPr lang="en-US" smtClean="0"/>
-              <a:t>5/22/2026</a:t>
+              <a:t>6/5/2026</a:t>
             </a:fld>
             <a:endParaRPr lang="en-US"/>
           </a:p>
@@ -2622,7 +2622,7 @@
           <a:p>
             <a:fld id="{6383FAE1-13DE-4511-8C1B-C8AFB720664C}" type="datetimeFigureOut">
               <a:rPr lang="en-US" smtClean="0"/>
-              <a:t>5/22/2026</a:t>
+              <a:t>6/5/2026</a:t>
             </a:fld>
             <a:endParaRPr lang="en-US"/>
           </a:p>
@@ -2933,7 +2933,7 @@
           <a:p>
             <a:fld id="{6383FAE1-13DE-4511-8C1B-C8AFB720664C}" type="datetimeFigureOut">
               <a:rPr lang="en-US" smtClean="0"/>
-              <a:t>5/22/2026</a:t>
+              <a:t>6/5/2026</a:t>
             </a:fld>
             <a:endParaRPr lang="en-US"/>
           </a:p>
@@ -3224,7 +3224,7 @@
           <a:p>
             <a:fld id="{6383FAE1-13DE-4511-8C1B-C8AFB720664C}" type="datetimeFigureOut">
               <a:rPr lang="en-US" smtClean="0"/>
-              <a:t>5/22/2026</a:t>
+              <a:t>6/5/2026</a:t>
             </a:fld>
             <a:endParaRPr lang="en-US"/>
           </a:p>
@@ -3468,7 +3468,7 @@
           <a:p>
             <a:fld id="{6383FAE1-13DE-4511-8C1B-C8AFB720664C}" type="datetimeFigureOut">
               <a:rPr lang="en-US" smtClean="0"/>
-              <a:t>5/22/2026</a:t>
+              <a:t>6/5/2026</a:t>
             </a:fld>
             <a:endParaRPr lang="en-US"/>
           </a:p>
@@ -4968,7 +4968,18 @@
                   </a:schemeClr>
                 </a:solidFill>
               </a:rPr>
-              <a:t>When the customer says "I think someone hacked my account," </a:t>
+              <a:t>When the customer says "</a:t>
+            </a:r>
+            <a:r>
+              <a:rPr lang="en-US" sz="2400" b="1" i="1" dirty="0">
+                <a:solidFill>
+                  <a:schemeClr val="accent6">
+                    <a:lumMod val="60000"/>
+                    <a:lumOff val="40000"/>
+                  </a:schemeClr>
+                </a:solidFill>
+              </a:rPr>
+              <a:t>I think someone hacked my account," </a:t>
             </a:r>
           </a:p>
           <a:p>
